--- a/docs/slides/dbjigu-for-managers.pptx
+++ b/docs/slides/dbjigu-for-managers.pptx
@@ -780,7 +780,7 @@
           <a:p>
             <a:r>
               <a:rPr lang="ja-JP" dirty="0"/>
-              <a:t>DbJigu は1ファイルで完結しているので、作者の保守が止まっても、コピーしたものはそのまま動きます。その代わり、不具合は自分たちで直すことになります。使う DB では、最初に動作を確かめてください。</a:t>
+              <a:t>DbJigu は1ファイルで完結しているので、作者の保守が止まっても、コピーしたものはそのまま動きます。その代わり、不具合は自分たちで直すことになります。使う DB では、最初に動作を確かめてください。ローカルで H2、本番で PostgreSQL を使う場合は、H2 で通っても本番の DB で同じ結果になるとは限りません。</a:t>
             </a:r>
             <a:endParaRPr lang="ja-JP" dirty="0"/>
           </a:p>
@@ -5503,7 +5503,7 @@
                             <a:schemeClr val="tx2"/>
                           </a:solidFill>
                         </a:rPr>
-                        <a:t>自動テストは PostgreSQL だけです。Oracle は使われた実績がありますが、自動テストはしていません。H2 は確認中です。</a:t>
+                        <a:t>自動テストは PostgreSQL と H2（既定のモードと PostgreSQL のモード）です。Oracle は使われた実績がありますが、自動テストはしていません。</a:t>
                       </a:r>
                       <a:endParaRPr lang="ja-JP" sz="1400" dirty="0"/>
                     </a:p>
@@ -5561,7 +5561,183 @@
                             <a:schemeClr val="tx2"/>
                           </a:solidFill>
                         </a:rPr>
-                        <a:t>使う DB で、最初に動作を確かめる</a:t>
+                        <a:t>それ以外の DB では、最初に動作を確かめる</a:t>
+                      </a:r>
+                      <a:endParaRPr lang="ja-JP" sz="1400" dirty="0"/>
+                    </a:p>
+                  </a:txBody>
+                  <a:tcPr marL="100584" marR="100584" marT="64008" marB="64008" anchor="ctr">
+                    <a:lnL w="9525" cap="flat" cmpd="sng" algn="ctr">
+                      <a:solidFill>
+                        <a:srgbClr val="EEF2F3"/>
+                      </a:solidFill>
+                      <a:prstDash val="solid"/>
+                      <a:round/>
+                      <a:headEnd type="none" w="med" len="med"/>
+                      <a:tailEnd type="none" w="med" len="med"/>
+                    </a:lnL>
+                    <a:lnR w="9525" cap="flat" cmpd="sng" algn="ctr">
+                      <a:solidFill>
+                        <a:srgbClr val="EEF2F3"/>
+                      </a:solidFill>
+                      <a:prstDash val="solid"/>
+                      <a:round/>
+                      <a:headEnd type="none" w="med" len="med"/>
+                      <a:tailEnd type="none" w="med" len="med"/>
+                    </a:lnR>
+                    <a:lnT w="9525" cap="flat" cmpd="sng" algn="ctr">
+                      <a:solidFill>
+                        <a:srgbClr val="EEF2F3"/>
+                      </a:solidFill>
+                      <a:prstDash val="solid"/>
+                      <a:round/>
+                      <a:headEnd type="none" w="med" len="med"/>
+                      <a:tailEnd type="none" w="med" len="med"/>
+                    </a:lnT>
+                    <a:lnB w="9525" cap="flat" cmpd="sng" algn="ctr">
+                      <a:solidFill>
+                        <a:srgbClr val="EEF2F3"/>
+                      </a:solidFill>
+                      <a:prstDash val="solid"/>
+                      <a:round/>
+                      <a:headEnd type="none" w="med" len="med"/>
+                      <a:tailEnd type="none" w="med" len="med"/>
+                    </a:lnB>
+                  </a:tcPr>
+                </a:tc>
+              </a:tr>
+              <a:tr h="1097280">
+                <a:tc>
+                  <a:txBody>
+                    <a:bodyPr/>
+                    <a:lstStyle/>
+                    <a:p>
+                      <a:pPr indent="0" marL="0">
+                        <a:buNone/>
+                      </a:pPr>
+                      <a:r>
+                        <a:rPr lang="ja-JP" altLang="en-US" sz="1400" b="1" dirty="0">
+                          <a:solidFill>
+                            <a:schemeClr val="tx1"/>
+                          </a:solidFill>
+                        </a:rPr>
+                        <a:t>H2 と本番の DB の違い</a:t>
+                      </a:r>
+                      <a:endParaRPr lang="ja-JP" sz="1400" dirty="0"/>
+                    </a:p>
+                  </a:txBody>
+                  <a:tcPr marL="100584" marR="100584" marT="64008" marB="64008" anchor="ctr">
+                    <a:lnL w="9525" cap="flat" cmpd="sng" algn="ctr">
+                      <a:solidFill>
+                        <a:srgbClr val="EEF2F3"/>
+                      </a:solidFill>
+                      <a:prstDash val="solid"/>
+                      <a:round/>
+                      <a:headEnd type="none" w="med" len="med"/>
+                      <a:tailEnd type="none" w="med" len="med"/>
+                    </a:lnL>
+                    <a:lnR w="9525" cap="flat" cmpd="sng" algn="ctr">
+                      <a:solidFill>
+                        <a:srgbClr val="EEF2F3"/>
+                      </a:solidFill>
+                      <a:prstDash val="solid"/>
+                      <a:round/>
+                      <a:headEnd type="none" w="med" len="med"/>
+                      <a:tailEnd type="none" w="med" len="med"/>
+                    </a:lnR>
+                    <a:lnT w="9525" cap="flat" cmpd="sng" algn="ctr">
+                      <a:solidFill>
+                        <a:srgbClr val="EEF2F3"/>
+                      </a:solidFill>
+                      <a:prstDash val="solid"/>
+                      <a:round/>
+                      <a:headEnd type="none" w="med" len="med"/>
+                      <a:tailEnd type="none" w="med" len="med"/>
+                    </a:lnT>
+                    <a:lnB w="9525" cap="flat" cmpd="sng" algn="ctr">
+                      <a:solidFill>
+                        <a:srgbClr val="EEF2F3"/>
+                      </a:solidFill>
+                      <a:prstDash val="solid"/>
+                      <a:round/>
+                      <a:headEnd type="none" w="med" len="med"/>
+                      <a:tailEnd type="none" w="med" len="med"/>
+                    </a:lnB>
+                  </a:tcPr>
+                </a:tc>
+                <a:tc>
+                  <a:txBody>
+                    <a:bodyPr/>
+                    <a:lstStyle/>
+                    <a:p>
+                      <a:pPr indent="0" marL="0">
+                        <a:buNone/>
+                      </a:pPr>
+                      <a:r>
+                        <a:rPr lang="ja-JP" altLang="en-US" sz="1400" dirty="0">
+                          <a:solidFill>
+                            <a:schemeClr val="tx2"/>
+                          </a:solidFill>
+                        </a:rPr>
+                        <a:t>丸めや文字列の比較など DB の振る舞いの違いで、H2 で通っても本番の DB では失敗することがあります。H2 は DDL をロールバックしません。</a:t>
+                      </a:r>
+                      <a:endParaRPr lang="ja-JP" sz="1400" dirty="0"/>
+                    </a:p>
+                  </a:txBody>
+                  <a:tcPr marL="100584" marR="100584" marT="64008" marB="64008" anchor="ctr">
+                    <a:lnL w="9525" cap="flat" cmpd="sng" algn="ctr">
+                      <a:solidFill>
+                        <a:srgbClr val="EEF2F3"/>
+                      </a:solidFill>
+                      <a:prstDash val="solid"/>
+                      <a:round/>
+                      <a:headEnd type="none" w="med" len="med"/>
+                      <a:tailEnd type="none" w="med" len="med"/>
+                    </a:lnL>
+                    <a:lnR w="9525" cap="flat" cmpd="sng" algn="ctr">
+                      <a:solidFill>
+                        <a:srgbClr val="EEF2F3"/>
+                      </a:solidFill>
+                      <a:prstDash val="solid"/>
+                      <a:round/>
+                      <a:headEnd type="none" w="med" len="med"/>
+                      <a:tailEnd type="none" w="med" len="med"/>
+                    </a:lnR>
+                    <a:lnT w="9525" cap="flat" cmpd="sng" algn="ctr">
+                      <a:solidFill>
+                        <a:srgbClr val="EEF2F3"/>
+                      </a:solidFill>
+                      <a:prstDash val="solid"/>
+                      <a:round/>
+                      <a:headEnd type="none" w="med" len="med"/>
+                      <a:tailEnd type="none" w="med" len="med"/>
+                    </a:lnT>
+                    <a:lnB w="9525" cap="flat" cmpd="sng" algn="ctr">
+                      <a:solidFill>
+                        <a:srgbClr val="EEF2F3"/>
+                      </a:solidFill>
+                      <a:prstDash val="solid"/>
+                      <a:round/>
+                      <a:headEnd type="none" w="med" len="med"/>
+                      <a:tailEnd type="none" w="med" len="med"/>
+                    </a:lnB>
+                  </a:tcPr>
+                </a:tc>
+                <a:tc>
+                  <a:txBody>
+                    <a:bodyPr/>
+                    <a:lstStyle/>
+                    <a:p>
+                      <a:pPr indent="0" marL="0">
+                        <a:buNone/>
+                      </a:pPr>
+                      <a:r>
+                        <a:rPr lang="ja-JP" altLang="en-US" sz="1400" dirty="0">
+                          <a:solidFill>
+                            <a:schemeClr val="tx2"/>
+                          </a:solidFill>
+                        </a:rPr>
+                        <a:t>本番と同じ DB でも定期的に動かす</a:t>
                       </a:r>
                       <a:endParaRPr lang="ja-JP" sz="1400" dirty="0"/>
                     </a:p>
@@ -10418,8 +10594,8 @@
         </p:nvSpPr>
         <p:spPr>
           <a:xfrm>
-            <a:off x="6675120" y="4709160"/>
-            <a:ext cx="4647895" cy="960120"/>
+            <a:off x="6675120" y="4681728"/>
+            <a:ext cx="4647895" cy="1005840"/>
           </a:xfrm>
           <a:prstGeom prst="rect">
             <a:avLst/>
@@ -10452,12 +10628,26 @@
               <a:buNone/>
             </a:pPr>
             <a:r>
-              <a:rPr lang="ja-JP" altLang="en-US" sz="1500" dirty="0">
+              <a:rPr lang="ja-JP" altLang="en-US" sz="1400" dirty="0">
                 <a:solidFill>
                   <a:schemeClr val="tx2"/>
                 </a:solidFill>
               </a:rPr>
-              <a:t>Java 17 以上と、JDBC で接続する DB（主に PostgreSQL。Oracle でも使われています）</a:t>
+              <a:t>Java 17 以上と、JDBC で接続する DB。</a:t>
+            </a:r>
+            <a:endParaRPr lang="ja-JP" sz="1500" dirty="0"/>
+          </a:p>
+          <a:p>
+            <a:pPr indent="0" marL="0">
+              <a:buNone/>
+            </a:pPr>
+            <a:r>
+              <a:rPr lang="ja-JP" altLang="en-US" sz="1400" dirty="0">
+                <a:solidFill>
+                  <a:schemeClr val="tx2"/>
+                </a:solidFill>
+              </a:rPr>
+              <a:t>PostgreSQL と H2 で自動テストをしています。Oracle にも使われた実績があります。</a:t>
             </a:r>
             <a:endParaRPr lang="ja-JP" sz="1500" dirty="0"/>
           </a:p>

--- a/docs/slides/dbjigu-for-managers.pptx
+++ b/docs/slides/dbjigu-for-managers.pptx
@@ -1572,7 +1572,7 @@
           <a:p>
             <a:r>
               <a:rPr lang="ja-JP" dirty="0"/>
-              <a:t>書式の決まりの範囲で、書き方を工夫するといろいろなケースに対応できます。この例では、投入の行と期待の行を同じファイルに上下に並べ、パターン名で使い分けています。ケースを増やすときは、行と、パラメータテストの引数を足すだけです。</a:t>
+              <a:t>書式の決まりの範囲で、書き方を工夫するといろいろなケースに対応できます。この例はガイドに載せている実物で、投入の行と期待の行を同じファイルに並べ、パターン名で使い分けています。パターンが空の行は、投入にも検証にも使われます。ケースを増やすときは、期待の行と、パラメータテストの引数の行を足します。</a:t>
             </a:r>
             <a:endParaRPr lang="ja-JP" dirty="0"/>
           </a:p>
@@ -12020,7 +12020,7 @@
                 <a:ea typeface="メイリオ" pitchFamily="34" charset="-122"/>
                 <a:cs typeface="Consolas" pitchFamily="34" charset="-120"/>
               </a:rPr>
-              <a:t>cases.txt（例）</a:t>
+              <a:t>restock/cases.txt</a:t>
             </a:r>
             <a:endParaRPr lang="ja-JP" sz="1100" dirty="0"/>
           </a:p>
@@ -12035,11 +12035,11 @@
         <p:spPr>
           <a:xfrm>
             <a:off x="548640" y="1591056"/>
-            <a:ext cx="5120640" cy="1921510"/>
+            <a:ext cx="5394960" cy="3255010"/>
           </a:xfrm>
           <a:prstGeom prst="roundRect">
             <a:avLst>
-              <a:gd name="adj" fmla="val 3807"/>
+              <a:gd name="adj" fmla="val 2247"/>
             </a:avLst>
           </a:prstGeom>
           <a:solidFill>
@@ -12057,7 +12057,7 @@
         <p:spPr>
           <a:xfrm>
             <a:off x="731520" y="1773936"/>
-            <a:ext cx="4754880" cy="1555750"/>
+            <a:ext cx="5029200" cy="2889250"/>
           </a:xfrm>
           <a:prstGeom prst="rect">
             <a:avLst/>
@@ -12189,7 +12189,7 @@
                 <a:ea typeface="メイリオ" pitchFamily="34" charset="-122"/>
                 <a:cs typeface="Consolas" pitchFamily="34" charset="-120"/>
               </a:rPr>
-              <a:t>unit_price</a:t>
+              <a:t>product_name</a:t>
             </a:r>
             <a:pPr indent="0" marL="0">
               <a:lnSpc>
@@ -12223,7 +12223,7 @@
                 <a:ea typeface="メイリオ" pitchFamily="34" charset="-122"/>
                 <a:cs typeface="Consolas" pitchFamily="34" charset="-120"/>
               </a:rPr>
-              <a:t>stock</a:t>
+              <a:t>unit_price</a:t>
             </a:r>
             <a:pPr indent="0" marL="0">
               <a:lnSpc>
@@ -12257,7 +12257,7 @@
                 <a:ea typeface="メイリオ" pitchFamily="34" charset="-122"/>
                 <a:cs typeface="Consolas" pitchFamily="34" charset="-120"/>
               </a:rPr>
-              <a:t>product_name</a:t>
+              <a:t>stock</a:t>
             </a:r>
             <a:pPr indent="0" marL="0">
               <a:lnSpc>
@@ -12294,7 +12294,7 @@
                 <a:ea typeface="メイリオ" pitchFamily="34" charset="-122"/>
                 <a:cs typeface="Consolas" pitchFamily="34" charset="-120"/>
               </a:rPr>
-              <a:t>// 入荷：P002 に 30 個入る</a:t>
+              <a:t>// 入荷しない商品：投入にも検証にも使う</a:t>
             </a:r>
             <a:endParaRPr lang="ja-JP" sz="1400" dirty="0"/>
           </a:p>
@@ -12306,15 +12306,15 @@
               <a:buNone/>
             </a:pPr>
             <a:r>
-              <a:rPr lang="ja-JP" altLang="en-US" sz="1400" b="1" dirty="0">
-                <a:solidFill>
-                  <a:schemeClr val="bg1"/>
+              <a:rPr lang="ja-JP" altLang="en-US" sz="1400" dirty="0">
+                <a:solidFill>
+                  <a:schemeClr val="accent5"/>
                 </a:solidFill>
                 <a:latin typeface="Consolas" pitchFamily="34" charset="0"/>
                 <a:ea typeface="メイリオ" pitchFamily="34" charset="-122"/>
                 <a:cs typeface="Consolas" pitchFamily="34" charset="-120"/>
               </a:rPr>
-              <a:t>INPUT001 </a:t>
+              <a:t>|</a:t>
             </a:r>
             <a:pPr indent="0" marL="0">
               <a:lnSpc>
@@ -12323,15 +12323,15 @@
               <a:buNone/>
             </a:pPr>
             <a:r>
-              <a:rPr lang="ja-JP" altLang="en-US" sz="1400" dirty="0">
-                <a:solidFill>
-                  <a:schemeClr val="accent5"/>
+              <a:rPr lang="ja-JP" altLang="en-US" sz="1400" b="1" dirty="0">
+                <a:solidFill>
+                  <a:schemeClr val="bg1"/>
                 </a:solidFill>
                 <a:latin typeface="Consolas" pitchFamily="34" charset="0"/>
                 <a:ea typeface="メイリオ" pitchFamily="34" charset="-122"/>
                 <a:cs typeface="Consolas" pitchFamily="34" charset="-120"/>
               </a:rPr>
-              <a:t>|</a:t>
+              <a:t>P003</a:t>
             </a:r>
             <a:pPr indent="0" marL="0">
               <a:lnSpc>
@@ -12340,15 +12340,15 @@
               <a:buNone/>
             </a:pPr>
             <a:r>
-              <a:rPr lang="ja-JP" altLang="en-US" sz="1400" b="1" dirty="0">
-                <a:solidFill>
-                  <a:schemeClr val="bg1"/>
+              <a:rPr lang="ja-JP" altLang="en-US" sz="1400" dirty="0">
+                <a:solidFill>
+                  <a:schemeClr val="accent5"/>
                 </a:solidFill>
                 <a:latin typeface="Consolas" pitchFamily="34" charset="0"/>
                 <a:ea typeface="メイリオ" pitchFamily="34" charset="-122"/>
                 <a:cs typeface="Consolas" pitchFamily="34" charset="-120"/>
               </a:rPr>
-              <a:t>P001</a:t>
+              <a:t>|</a:t>
             </a:r>
             <a:pPr indent="0" marL="0">
               <a:lnSpc>
@@ -12357,15 +12357,15 @@
               <a:buNone/>
             </a:pPr>
             <a:r>
-              <a:rPr lang="ja-JP" altLang="en-US" sz="1400" dirty="0">
-                <a:solidFill>
-                  <a:schemeClr val="accent5"/>
+              <a:rPr lang="ja-JP" altLang="en-US" sz="1400" b="1" dirty="0">
+                <a:solidFill>
+                  <a:schemeClr val="bg1"/>
                 </a:solidFill>
                 <a:latin typeface="Consolas" pitchFamily="34" charset="0"/>
                 <a:ea typeface="メイリオ" pitchFamily="34" charset="-122"/>
                 <a:cs typeface="Consolas" pitchFamily="34" charset="-120"/>
               </a:rPr>
-              <a:t>|</a:t>
+              <a:t>消しゴム</a:t>
             </a:r>
             <a:pPr indent="0" marL="0">
               <a:lnSpc>
@@ -12374,15 +12374,15 @@
               <a:buNone/>
             </a:pPr>
             <a:r>
-              <a:rPr lang="ja-JP" altLang="en-US" sz="1400" b="1" dirty="0">
-                <a:solidFill>
-                  <a:schemeClr val="bg1"/>
+              <a:rPr lang="ja-JP" altLang="en-US" sz="1400" dirty="0">
+                <a:solidFill>
+                  <a:schemeClr val="accent5"/>
                 </a:solidFill>
                 <a:latin typeface="Consolas" pitchFamily="34" charset="0"/>
                 <a:ea typeface="メイリオ" pitchFamily="34" charset="-122"/>
                 <a:cs typeface="Consolas" pitchFamily="34" charset="-120"/>
               </a:rPr>
-              <a:t>120</a:t>
+              <a:t>|</a:t>
             </a:r>
             <a:pPr indent="0" marL="0">
               <a:lnSpc>
@@ -12391,15 +12391,15 @@
               <a:buNone/>
             </a:pPr>
             <a:r>
-              <a:rPr lang="ja-JP" altLang="en-US" sz="1400" dirty="0">
-                <a:solidFill>
-                  <a:schemeClr val="accent5"/>
+              <a:rPr lang="ja-JP" altLang="en-US" sz="1400" b="1" dirty="0">
+                <a:solidFill>
+                  <a:schemeClr val="bg1"/>
                 </a:solidFill>
                 <a:latin typeface="Consolas" pitchFamily="34" charset="0"/>
                 <a:ea typeface="メイリオ" pitchFamily="34" charset="-122"/>
                 <a:cs typeface="Consolas" pitchFamily="34" charset="-120"/>
               </a:rPr>
-              <a:t>|</a:t>
+              <a:t>80</a:t>
             </a:r>
             <a:pPr indent="0" marL="0">
               <a:lnSpc>
@@ -12408,15 +12408,15 @@
               <a:buNone/>
             </a:pPr>
             <a:r>
-              <a:rPr lang="ja-JP" altLang="en-US" sz="1400" b="1" dirty="0">
-                <a:solidFill>
-                  <a:schemeClr val="bg1"/>
+              <a:rPr lang="ja-JP" altLang="en-US" sz="1400" dirty="0">
+                <a:solidFill>
+                  <a:schemeClr val="accent5"/>
                 </a:solidFill>
                 <a:latin typeface="Consolas" pitchFamily="34" charset="0"/>
                 <a:ea typeface="メイリオ" pitchFamily="34" charset="-122"/>
                 <a:cs typeface="Consolas" pitchFamily="34" charset="-120"/>
               </a:rPr>
-              <a:t>100</a:t>
+              <a:t>|</a:t>
             </a:r>
             <a:pPr indent="0" marL="0">
               <a:lnSpc>
@@ -12425,16 +12425,19 @@
               <a:buNone/>
             </a:pPr>
             <a:r>
-              <a:rPr lang="ja-JP" altLang="en-US" sz="1400" dirty="0">
-                <a:solidFill>
-                  <a:schemeClr val="accent5"/>
+              <a:rPr lang="ja-JP" altLang="en-US" sz="1400" b="1" dirty="0">
+                <a:solidFill>
+                  <a:schemeClr val="bg1"/>
                 </a:solidFill>
                 <a:latin typeface="Consolas" pitchFamily="34" charset="0"/>
                 <a:ea typeface="メイリオ" pitchFamily="34" charset="-122"/>
                 <a:cs typeface="Consolas" pitchFamily="34" charset="-120"/>
               </a:rPr>
-              <a:t>|</a:t>
-            </a:r>
+              <a:t>10</a:t>
+            </a:r>
+            <a:endParaRPr lang="ja-JP" sz="1400" dirty="0"/>
+          </a:p>
+          <a:p>
             <a:pPr indent="0" marL="0">
               <a:lnSpc>
                 <a:spcPct val="100000"/>
@@ -12442,15 +12445,15 @@
               <a:buNone/>
             </a:pPr>
             <a:r>
-              <a:rPr lang="ja-JP" altLang="en-US" sz="1400" b="1" dirty="0">
-                <a:solidFill>
-                  <a:schemeClr val="bg1"/>
+              <a:rPr lang="ja-JP" altLang="en-US" sz="1400" dirty="0">
+                <a:solidFill>
+                  <a:schemeClr val="accent5"/>
                 </a:solidFill>
                 <a:latin typeface="Consolas" pitchFamily="34" charset="0"/>
                 <a:ea typeface="メイリオ" pitchFamily="34" charset="-122"/>
                 <a:cs typeface="Consolas" pitchFamily="34" charset="-120"/>
               </a:rPr>
-              <a:t>ボールペン</a:t>
+              <a:t>// 入荷前の在庫：どちらのケースでも同じ</a:t>
             </a:r>
             <a:endParaRPr lang="ja-JP" sz="1400" dirty="0"/>
           </a:p>
@@ -12470,7 +12473,7 @@
                 <a:ea typeface="メイリオ" pitchFamily="34" charset="-122"/>
                 <a:cs typeface="Consolas" pitchFamily="34" charset="-120"/>
               </a:rPr>
-              <a:t>INPUT001 </a:t>
+              <a:t>INPUT001,INPUT002</a:t>
             </a:r>
             <a:pPr indent="0" marL="0">
               <a:lnSpc>
@@ -12504,7 +12507,7 @@
                 <a:ea typeface="メイリオ" pitchFamily="34" charset="-122"/>
                 <a:cs typeface="Consolas" pitchFamily="34" charset="-120"/>
               </a:rPr>
-              <a:t>P002</a:t>
+              <a:t>P001</a:t>
             </a:r>
             <a:pPr indent="0" marL="0">
               <a:lnSpc>
@@ -12538,7 +12541,7 @@
                 <a:ea typeface="メイリオ" pitchFamily="34" charset="-122"/>
                 <a:cs typeface="Consolas" pitchFamily="34" charset="-120"/>
               </a:rPr>
-              <a:t>300</a:t>
+              <a:t>ボールペン</a:t>
             </a:r>
             <a:pPr indent="0" marL="0">
               <a:lnSpc>
@@ -12572,7 +12575,7 @@
                 <a:ea typeface="メイリオ" pitchFamily="34" charset="-122"/>
                 <a:cs typeface="Consolas" pitchFamily="34" charset="-120"/>
               </a:rPr>
-              <a:t>50 </a:t>
+              <a:t>120</a:t>
             </a:r>
             <a:pPr indent="0" marL="0">
               <a:lnSpc>
@@ -12606,7 +12609,7 @@
                 <a:ea typeface="メイリオ" pitchFamily="34" charset="-122"/>
                 <a:cs typeface="Consolas" pitchFamily="34" charset="-120"/>
               </a:rPr>
-              <a:t>ノート</a:t>
+              <a:t>100</a:t>
             </a:r>
             <a:endParaRPr lang="ja-JP" sz="1400" dirty="0"/>
           </a:p>
@@ -12626,7 +12629,7 @@
                 <a:ea typeface="メイリオ" pitchFamily="34" charset="-122"/>
                 <a:cs typeface="Consolas" pitchFamily="34" charset="-120"/>
               </a:rPr>
-              <a:t>OUTPUT001</a:t>
+              <a:t>INPUT001,INPUT002</a:t>
             </a:r>
             <a:pPr indent="0" marL="0">
               <a:lnSpc>
@@ -12660,7 +12663,7 @@
                 <a:ea typeface="メイリオ" pitchFamily="34" charset="-122"/>
                 <a:cs typeface="Consolas" pitchFamily="34" charset="-120"/>
               </a:rPr>
-              <a:t>P001</a:t>
+              <a:t>P002</a:t>
             </a:r>
             <a:pPr indent="0" marL="0">
               <a:lnSpc>
@@ -12694,7 +12697,7 @@
                 <a:ea typeface="メイリオ" pitchFamily="34" charset="-122"/>
                 <a:cs typeface="Consolas" pitchFamily="34" charset="-120"/>
               </a:rPr>
-              <a:t>120</a:t>
+              <a:t>ノート</a:t>
             </a:r>
             <a:pPr indent="0" marL="0">
               <a:lnSpc>
@@ -12728,7 +12731,7 @@
                 <a:ea typeface="メイリオ" pitchFamily="34" charset="-122"/>
                 <a:cs typeface="Consolas" pitchFamily="34" charset="-120"/>
               </a:rPr>
-              <a:t>100</a:t>
+              <a:t>300</a:t>
             </a:r>
             <a:pPr indent="0" marL="0">
               <a:lnSpc>
@@ -12762,7 +12765,7 @@
                 <a:ea typeface="メイリオ" pitchFamily="34" charset="-122"/>
                 <a:cs typeface="Consolas" pitchFamily="34" charset="-120"/>
               </a:rPr>
-              <a:t>ボールペン</a:t>
+              <a:t>50</a:t>
             </a:r>
             <a:endParaRPr lang="ja-JP" sz="1400" dirty="0"/>
           </a:p>
@@ -12774,16 +12777,19 @@
               <a:buNone/>
             </a:pPr>
             <a:r>
-              <a:rPr lang="ja-JP" altLang="en-US" sz="1400" b="1" dirty="0">
-                <a:solidFill>
-                  <a:schemeClr val="bg1"/>
+              <a:rPr lang="ja-JP" altLang="en-US" sz="1400" dirty="0">
+                <a:solidFill>
+                  <a:schemeClr val="accent5"/>
                 </a:solidFill>
                 <a:latin typeface="Consolas" pitchFamily="34" charset="0"/>
                 <a:ea typeface="メイリオ" pitchFamily="34" charset="-122"/>
                 <a:cs typeface="Consolas" pitchFamily="34" charset="-120"/>
               </a:rPr>
-              <a:t>OUTPUT001</a:t>
-            </a:r>
+              <a:t>// ケース1：P002 に 30 個入荷する</a:t>
+            </a:r>
+            <a:endParaRPr lang="ja-JP" sz="1400" dirty="0"/>
+          </a:p>
+          <a:p>
             <a:pPr indent="0" marL="0">
               <a:lnSpc>
                 <a:spcPct val="100000"/>
@@ -12791,15 +12797,15 @@
               <a:buNone/>
             </a:pPr>
             <a:r>
-              <a:rPr lang="ja-JP" altLang="en-US" sz="1400" dirty="0">
-                <a:solidFill>
-                  <a:schemeClr val="accent5"/>
+              <a:rPr lang="ja-JP" altLang="en-US" sz="1400" b="1" dirty="0">
+                <a:solidFill>
+                  <a:schemeClr val="bg1"/>
                 </a:solidFill>
                 <a:latin typeface="Consolas" pitchFamily="34" charset="0"/>
                 <a:ea typeface="メイリオ" pitchFamily="34" charset="-122"/>
                 <a:cs typeface="Consolas" pitchFamily="34" charset="-120"/>
               </a:rPr>
-              <a:t>|</a:t>
+              <a:t>OUTPUT001</a:t>
             </a:r>
             <a:pPr indent="0" marL="0">
               <a:lnSpc>
@@ -12808,15 +12814,15 @@
               <a:buNone/>
             </a:pPr>
             <a:r>
-              <a:rPr lang="ja-JP" altLang="en-US" sz="1400" b="1" dirty="0">
-                <a:solidFill>
-                  <a:schemeClr val="bg1"/>
+              <a:rPr lang="ja-JP" altLang="en-US" sz="1400" dirty="0">
+                <a:solidFill>
+                  <a:schemeClr val="accent5"/>
                 </a:solidFill>
                 <a:latin typeface="Consolas" pitchFamily="34" charset="0"/>
                 <a:ea typeface="メイリオ" pitchFamily="34" charset="-122"/>
                 <a:cs typeface="Consolas" pitchFamily="34" charset="-120"/>
               </a:rPr>
-              <a:t>P002</a:t>
+              <a:t>|</a:t>
             </a:r>
             <a:pPr indent="0" marL="0">
               <a:lnSpc>
@@ -12825,15 +12831,15 @@
               <a:buNone/>
             </a:pPr>
             <a:r>
-              <a:rPr lang="ja-JP" altLang="en-US" sz="1400" dirty="0">
-                <a:solidFill>
-                  <a:schemeClr val="accent5"/>
+              <a:rPr lang="ja-JP" altLang="en-US" sz="1400" b="1" dirty="0">
+                <a:solidFill>
+                  <a:schemeClr val="bg1"/>
                 </a:solidFill>
                 <a:latin typeface="Consolas" pitchFamily="34" charset="0"/>
                 <a:ea typeface="メイリオ" pitchFamily="34" charset="-122"/>
                 <a:cs typeface="Consolas" pitchFamily="34" charset="-120"/>
               </a:rPr>
-              <a:t>|</a:t>
+              <a:t>P001</a:t>
             </a:r>
             <a:pPr indent="0" marL="0">
               <a:lnSpc>
@@ -12842,15 +12848,15 @@
               <a:buNone/>
             </a:pPr>
             <a:r>
-              <a:rPr lang="ja-JP" altLang="en-US" sz="1400" b="1" dirty="0">
-                <a:solidFill>
-                  <a:schemeClr val="bg1"/>
+              <a:rPr lang="ja-JP" altLang="en-US" sz="1400" dirty="0">
+                <a:solidFill>
+                  <a:schemeClr val="accent5"/>
                 </a:solidFill>
                 <a:latin typeface="Consolas" pitchFamily="34" charset="0"/>
                 <a:ea typeface="メイリオ" pitchFamily="34" charset="-122"/>
                 <a:cs typeface="Consolas" pitchFamily="34" charset="-120"/>
               </a:rPr>
-              <a:t>300</a:t>
+              <a:t>|</a:t>
             </a:r>
             <a:pPr indent="0" marL="0">
               <a:lnSpc>
@@ -12859,15 +12865,15 @@
               <a:buNone/>
             </a:pPr>
             <a:r>
-              <a:rPr lang="ja-JP" altLang="en-US" sz="1400" dirty="0">
-                <a:solidFill>
-                  <a:schemeClr val="accent5"/>
+              <a:rPr lang="ja-JP" altLang="en-US" sz="1400" b="1" dirty="0">
+                <a:solidFill>
+                  <a:schemeClr val="bg1"/>
                 </a:solidFill>
                 <a:latin typeface="Consolas" pitchFamily="34" charset="0"/>
                 <a:ea typeface="メイリオ" pitchFamily="34" charset="-122"/>
                 <a:cs typeface="Consolas" pitchFamily="34" charset="-120"/>
               </a:rPr>
-              <a:t>|</a:t>
+              <a:t>ボールペン</a:t>
             </a:r>
             <a:pPr indent="0" marL="0">
               <a:lnSpc>
@@ -12876,15 +12882,15 @@
               <a:buNone/>
             </a:pPr>
             <a:r>
-              <a:rPr lang="ja-JP" altLang="en-US" sz="1400" b="1" dirty="0">
-                <a:solidFill>
-                  <a:schemeClr val="bg1"/>
+              <a:rPr lang="ja-JP" altLang="en-US" sz="1400" dirty="0">
+                <a:solidFill>
+                  <a:schemeClr val="accent5"/>
                 </a:solidFill>
                 <a:latin typeface="Consolas" pitchFamily="34" charset="0"/>
                 <a:ea typeface="メイリオ" pitchFamily="34" charset="-122"/>
                 <a:cs typeface="Consolas" pitchFamily="34" charset="-120"/>
               </a:rPr>
-              <a:t>80 </a:t>
+              <a:t>|</a:t>
             </a:r>
             <a:pPr indent="0" marL="0">
               <a:lnSpc>
@@ -12893,15 +12899,15 @@
               <a:buNone/>
             </a:pPr>
             <a:r>
-              <a:rPr lang="ja-JP" altLang="en-US" sz="1400" dirty="0">
-                <a:solidFill>
-                  <a:schemeClr val="accent5"/>
+              <a:rPr lang="ja-JP" altLang="en-US" sz="1400" b="1" dirty="0">
+                <a:solidFill>
+                  <a:schemeClr val="bg1"/>
                 </a:solidFill>
                 <a:latin typeface="Consolas" pitchFamily="34" charset="0"/>
                 <a:ea typeface="メイリオ" pitchFamily="34" charset="-122"/>
                 <a:cs typeface="Consolas" pitchFamily="34" charset="-120"/>
               </a:rPr>
-              <a:t>|</a:t>
+              <a:t>120</a:t>
             </a:r>
             <a:pPr indent="0" marL="0">
               <a:lnSpc>
@@ -12910,70 +12916,539 @@
               <a:buNone/>
             </a:pPr>
             <a:r>
-              <a:rPr lang="ja-JP" altLang="en-US" sz="1400" b="1" dirty="0">
-                <a:solidFill>
-                  <a:schemeClr val="bg1"/>
+              <a:rPr lang="ja-JP" altLang="en-US" sz="1400" dirty="0">
+                <a:solidFill>
+                  <a:schemeClr val="accent5"/>
                 </a:solidFill>
                 <a:latin typeface="Consolas" pitchFamily="34" charset="0"/>
                 <a:ea typeface="メイリオ" pitchFamily="34" charset="-122"/>
                 <a:cs typeface="Consolas" pitchFamily="34" charset="-120"/>
               </a:rPr>
+              <a:t>|</a:t>
+            </a:r>
+            <a:pPr indent="0" marL="0">
+              <a:lnSpc>
+                <a:spcPct val="100000"/>
+              </a:lnSpc>
+              <a:buNone/>
+            </a:pPr>
+            <a:r>
+              <a:rPr lang="ja-JP" altLang="en-US" sz="1400" b="1" dirty="0">
+                <a:solidFill>
+                  <a:schemeClr val="bg1"/>
+                </a:solidFill>
+                <a:latin typeface="Consolas" pitchFamily="34" charset="0"/>
+                <a:ea typeface="メイリオ" pitchFamily="34" charset="-122"/>
+                <a:cs typeface="Consolas" pitchFamily="34" charset="-120"/>
+              </a:rPr>
+              <a:t>100</a:t>
+            </a:r>
+            <a:endParaRPr lang="ja-JP" sz="1400" dirty="0"/>
+          </a:p>
+          <a:p>
+            <a:pPr indent="0" marL="0">
+              <a:lnSpc>
+                <a:spcPct val="100000"/>
+              </a:lnSpc>
+              <a:buNone/>
+            </a:pPr>
+            <a:r>
+              <a:rPr lang="ja-JP" altLang="en-US" sz="1400" b="1" dirty="0">
+                <a:solidFill>
+                  <a:schemeClr val="bg1"/>
+                </a:solidFill>
+                <a:latin typeface="Consolas" pitchFamily="34" charset="0"/>
+                <a:ea typeface="メイリオ" pitchFamily="34" charset="-122"/>
+                <a:cs typeface="Consolas" pitchFamily="34" charset="-120"/>
+              </a:rPr>
+              <a:t>OUTPUT001</a:t>
+            </a:r>
+            <a:pPr indent="0" marL="0">
+              <a:lnSpc>
+                <a:spcPct val="100000"/>
+              </a:lnSpc>
+              <a:buNone/>
+            </a:pPr>
+            <a:r>
+              <a:rPr lang="ja-JP" altLang="en-US" sz="1400" dirty="0">
+                <a:solidFill>
+                  <a:schemeClr val="accent5"/>
+                </a:solidFill>
+                <a:latin typeface="Consolas" pitchFamily="34" charset="0"/>
+                <a:ea typeface="メイリオ" pitchFamily="34" charset="-122"/>
+                <a:cs typeface="Consolas" pitchFamily="34" charset="-120"/>
+              </a:rPr>
+              <a:t>|</a:t>
+            </a:r>
+            <a:pPr indent="0" marL="0">
+              <a:lnSpc>
+                <a:spcPct val="100000"/>
+              </a:lnSpc>
+              <a:buNone/>
+            </a:pPr>
+            <a:r>
+              <a:rPr lang="ja-JP" altLang="en-US" sz="1400" b="1" dirty="0">
+                <a:solidFill>
+                  <a:schemeClr val="bg1"/>
+                </a:solidFill>
+                <a:latin typeface="Consolas" pitchFamily="34" charset="0"/>
+                <a:ea typeface="メイリオ" pitchFamily="34" charset="-122"/>
+                <a:cs typeface="Consolas" pitchFamily="34" charset="-120"/>
+              </a:rPr>
+              <a:t>P002</a:t>
+            </a:r>
+            <a:pPr indent="0" marL="0">
+              <a:lnSpc>
+                <a:spcPct val="100000"/>
+              </a:lnSpc>
+              <a:buNone/>
+            </a:pPr>
+            <a:r>
+              <a:rPr lang="ja-JP" altLang="en-US" sz="1400" dirty="0">
+                <a:solidFill>
+                  <a:schemeClr val="accent5"/>
+                </a:solidFill>
+                <a:latin typeface="Consolas" pitchFamily="34" charset="0"/>
+                <a:ea typeface="メイリオ" pitchFamily="34" charset="-122"/>
+                <a:cs typeface="Consolas" pitchFamily="34" charset="-120"/>
+              </a:rPr>
+              <a:t>|</a:t>
+            </a:r>
+            <a:pPr indent="0" marL="0">
+              <a:lnSpc>
+                <a:spcPct val="100000"/>
+              </a:lnSpc>
+              <a:buNone/>
+            </a:pPr>
+            <a:r>
+              <a:rPr lang="ja-JP" altLang="en-US" sz="1400" b="1" dirty="0">
+                <a:solidFill>
+                  <a:schemeClr val="bg1"/>
+                </a:solidFill>
+                <a:latin typeface="Consolas" pitchFamily="34" charset="0"/>
+                <a:ea typeface="メイリオ" pitchFamily="34" charset="-122"/>
+                <a:cs typeface="Consolas" pitchFamily="34" charset="-120"/>
+              </a:rPr>
               <a:t>ノート</a:t>
             </a:r>
+            <a:pPr indent="0" marL="0">
+              <a:lnSpc>
+                <a:spcPct val="100000"/>
+              </a:lnSpc>
+              <a:buNone/>
+            </a:pPr>
+            <a:r>
+              <a:rPr lang="ja-JP" altLang="en-US" sz="1400" dirty="0">
+                <a:solidFill>
+                  <a:schemeClr val="accent5"/>
+                </a:solidFill>
+                <a:latin typeface="Consolas" pitchFamily="34" charset="0"/>
+                <a:ea typeface="メイリオ" pitchFamily="34" charset="-122"/>
+                <a:cs typeface="Consolas" pitchFamily="34" charset="-120"/>
+              </a:rPr>
+              <a:t>|</a:t>
+            </a:r>
+            <a:pPr indent="0" marL="0">
+              <a:lnSpc>
+                <a:spcPct val="100000"/>
+              </a:lnSpc>
+              <a:buNone/>
+            </a:pPr>
+            <a:r>
+              <a:rPr lang="ja-JP" altLang="en-US" sz="1400" b="1" dirty="0">
+                <a:solidFill>
+                  <a:schemeClr val="bg1"/>
+                </a:solidFill>
+                <a:latin typeface="Consolas" pitchFamily="34" charset="0"/>
+                <a:ea typeface="メイリオ" pitchFamily="34" charset="-122"/>
+                <a:cs typeface="Consolas" pitchFamily="34" charset="-120"/>
+              </a:rPr>
+              <a:t>300</a:t>
+            </a:r>
+            <a:pPr indent="0" marL="0">
+              <a:lnSpc>
+                <a:spcPct val="100000"/>
+              </a:lnSpc>
+              <a:buNone/>
+            </a:pPr>
+            <a:r>
+              <a:rPr lang="ja-JP" altLang="en-US" sz="1400" dirty="0">
+                <a:solidFill>
+                  <a:schemeClr val="accent5"/>
+                </a:solidFill>
+                <a:latin typeface="Consolas" pitchFamily="34" charset="0"/>
+                <a:ea typeface="メイリオ" pitchFamily="34" charset="-122"/>
+                <a:cs typeface="Consolas" pitchFamily="34" charset="-120"/>
+              </a:rPr>
+              <a:t>|</a:t>
+            </a:r>
+            <a:pPr indent="0" marL="0">
+              <a:lnSpc>
+                <a:spcPct val="100000"/>
+              </a:lnSpc>
+              <a:buNone/>
+            </a:pPr>
+            <a:r>
+              <a:rPr lang="ja-JP" altLang="en-US" sz="1400" b="1" dirty="0">
+                <a:solidFill>
+                  <a:schemeClr val="bg1"/>
+                </a:solidFill>
+                <a:latin typeface="Consolas" pitchFamily="34" charset="0"/>
+                <a:ea typeface="メイリオ" pitchFamily="34" charset="-122"/>
+                <a:cs typeface="Consolas" pitchFamily="34" charset="-120"/>
+              </a:rPr>
+              <a:t>80</a:t>
+            </a:r>
             <a:endParaRPr lang="ja-JP" sz="1400" dirty="0"/>
           </a:p>
-        </p:txBody>
-      </p:sp>
-      <p:sp>
-        <p:nvSpPr>
-          <p:cNvPr id="8" name="Text 5"/>
-          <p:cNvSpPr txBox="1"/>
-          <p:nvPr/>
-        </p:nvSpPr>
-        <p:spPr>
-          <a:xfrm>
-            <a:off x="548640" y="3741166"/>
-            <a:ext cx="5120640" cy="365760"/>
-          </a:xfrm>
-          <a:prstGeom prst="rect">
-            <a:avLst/>
-          </a:prstGeom>
-          <a:noFill/>
-          <a:ln/>
-        </p:spPr>
-        <p:txBody>
-          <a:bodyPr wrap="square" lIns="0" tIns="0" rIns="0" bIns="0" rtlCol="0" anchor="t"/>
-          <a:lstStyle/>
-          <a:p>
-            <a:pPr indent="0" marL="0">
+          <a:p>
+            <a:pPr indent="0" marL="0">
+              <a:lnSpc>
+                <a:spcPct val="100000"/>
+              </a:lnSpc>
               <a:buNone/>
             </a:pPr>
             <a:r>
               <a:rPr lang="ja-JP" altLang="en-US" sz="1400" dirty="0">
                 <a:solidFill>
-                  <a:schemeClr val="tx2"/>
-                </a:solidFill>
-              </a:rPr>
-              <a:t>INPUT と OUTPUT の組を、パラメータテストの引数にします。</a:t>
+                  <a:schemeClr val="accent5"/>
+                </a:solidFill>
+                <a:latin typeface="Consolas" pitchFamily="34" charset="0"/>
+                <a:ea typeface="メイリオ" pitchFamily="34" charset="-122"/>
+                <a:cs typeface="Consolas" pitchFamily="34" charset="-120"/>
+              </a:rPr>
+              <a:t>// ケース2：P001 に 20 個入荷する</a:t>
             </a:r>
             <a:endParaRPr lang="ja-JP" sz="1400" dirty="0"/>
           </a:p>
-        </p:txBody>
-      </p:sp>
-      <p:sp>
-        <p:nvSpPr>
-          <p:cNvPr id="9" name="Shape 6"/>
+          <a:p>
+            <a:pPr indent="0" marL="0">
+              <a:lnSpc>
+                <a:spcPct val="100000"/>
+              </a:lnSpc>
+              <a:buNone/>
+            </a:pPr>
+            <a:r>
+              <a:rPr lang="ja-JP" altLang="en-US" sz="1400" b="1" dirty="0">
+                <a:solidFill>
+                  <a:schemeClr val="bg1"/>
+                </a:solidFill>
+                <a:latin typeface="Consolas" pitchFamily="34" charset="0"/>
+                <a:ea typeface="メイリオ" pitchFamily="34" charset="-122"/>
+                <a:cs typeface="Consolas" pitchFamily="34" charset="-120"/>
+              </a:rPr>
+              <a:t>OUTPUT002</a:t>
+            </a:r>
+            <a:pPr indent="0" marL="0">
+              <a:lnSpc>
+                <a:spcPct val="100000"/>
+              </a:lnSpc>
+              <a:buNone/>
+            </a:pPr>
+            <a:r>
+              <a:rPr lang="ja-JP" altLang="en-US" sz="1400" dirty="0">
+                <a:solidFill>
+                  <a:schemeClr val="accent5"/>
+                </a:solidFill>
+                <a:latin typeface="Consolas" pitchFamily="34" charset="0"/>
+                <a:ea typeface="メイリオ" pitchFamily="34" charset="-122"/>
+                <a:cs typeface="Consolas" pitchFamily="34" charset="-120"/>
+              </a:rPr>
+              <a:t>|</a:t>
+            </a:r>
+            <a:pPr indent="0" marL="0">
+              <a:lnSpc>
+                <a:spcPct val="100000"/>
+              </a:lnSpc>
+              <a:buNone/>
+            </a:pPr>
+            <a:r>
+              <a:rPr lang="ja-JP" altLang="en-US" sz="1400" b="1" dirty="0">
+                <a:solidFill>
+                  <a:schemeClr val="bg1"/>
+                </a:solidFill>
+                <a:latin typeface="Consolas" pitchFamily="34" charset="0"/>
+                <a:ea typeface="メイリオ" pitchFamily="34" charset="-122"/>
+                <a:cs typeface="Consolas" pitchFamily="34" charset="-120"/>
+              </a:rPr>
+              <a:t>P001</a:t>
+            </a:r>
+            <a:pPr indent="0" marL="0">
+              <a:lnSpc>
+                <a:spcPct val="100000"/>
+              </a:lnSpc>
+              <a:buNone/>
+            </a:pPr>
+            <a:r>
+              <a:rPr lang="ja-JP" altLang="en-US" sz="1400" dirty="0">
+                <a:solidFill>
+                  <a:schemeClr val="accent5"/>
+                </a:solidFill>
+                <a:latin typeface="Consolas" pitchFamily="34" charset="0"/>
+                <a:ea typeface="メイリオ" pitchFamily="34" charset="-122"/>
+                <a:cs typeface="Consolas" pitchFamily="34" charset="-120"/>
+              </a:rPr>
+              <a:t>|</a:t>
+            </a:r>
+            <a:pPr indent="0" marL="0">
+              <a:lnSpc>
+                <a:spcPct val="100000"/>
+              </a:lnSpc>
+              <a:buNone/>
+            </a:pPr>
+            <a:r>
+              <a:rPr lang="ja-JP" altLang="en-US" sz="1400" b="1" dirty="0">
+                <a:solidFill>
+                  <a:schemeClr val="bg1"/>
+                </a:solidFill>
+                <a:latin typeface="Consolas" pitchFamily="34" charset="0"/>
+                <a:ea typeface="メイリオ" pitchFamily="34" charset="-122"/>
+                <a:cs typeface="Consolas" pitchFamily="34" charset="-120"/>
+              </a:rPr>
+              <a:t>ボールペン</a:t>
+            </a:r>
+            <a:pPr indent="0" marL="0">
+              <a:lnSpc>
+                <a:spcPct val="100000"/>
+              </a:lnSpc>
+              <a:buNone/>
+            </a:pPr>
+            <a:r>
+              <a:rPr lang="ja-JP" altLang="en-US" sz="1400" dirty="0">
+                <a:solidFill>
+                  <a:schemeClr val="accent5"/>
+                </a:solidFill>
+                <a:latin typeface="Consolas" pitchFamily="34" charset="0"/>
+                <a:ea typeface="メイリオ" pitchFamily="34" charset="-122"/>
+                <a:cs typeface="Consolas" pitchFamily="34" charset="-120"/>
+              </a:rPr>
+              <a:t>|</a:t>
+            </a:r>
+            <a:pPr indent="0" marL="0">
+              <a:lnSpc>
+                <a:spcPct val="100000"/>
+              </a:lnSpc>
+              <a:buNone/>
+            </a:pPr>
+            <a:r>
+              <a:rPr lang="ja-JP" altLang="en-US" sz="1400" b="1" dirty="0">
+                <a:solidFill>
+                  <a:schemeClr val="bg1"/>
+                </a:solidFill>
+                <a:latin typeface="Consolas" pitchFamily="34" charset="0"/>
+                <a:ea typeface="メイリオ" pitchFamily="34" charset="-122"/>
+                <a:cs typeface="Consolas" pitchFamily="34" charset="-120"/>
+              </a:rPr>
+              <a:t>120</a:t>
+            </a:r>
+            <a:pPr indent="0" marL="0">
+              <a:lnSpc>
+                <a:spcPct val="100000"/>
+              </a:lnSpc>
+              <a:buNone/>
+            </a:pPr>
+            <a:r>
+              <a:rPr lang="ja-JP" altLang="en-US" sz="1400" dirty="0">
+                <a:solidFill>
+                  <a:schemeClr val="accent5"/>
+                </a:solidFill>
+                <a:latin typeface="Consolas" pitchFamily="34" charset="0"/>
+                <a:ea typeface="メイリオ" pitchFamily="34" charset="-122"/>
+                <a:cs typeface="Consolas" pitchFamily="34" charset="-120"/>
+              </a:rPr>
+              <a:t>|</a:t>
+            </a:r>
+            <a:pPr indent="0" marL="0">
+              <a:lnSpc>
+                <a:spcPct val="100000"/>
+              </a:lnSpc>
+              <a:buNone/>
+            </a:pPr>
+            <a:r>
+              <a:rPr lang="ja-JP" altLang="en-US" sz="1400" b="1" dirty="0">
+                <a:solidFill>
+                  <a:schemeClr val="bg1"/>
+                </a:solidFill>
+                <a:latin typeface="Consolas" pitchFamily="34" charset="0"/>
+                <a:ea typeface="メイリオ" pitchFamily="34" charset="-122"/>
+                <a:cs typeface="Consolas" pitchFamily="34" charset="-120"/>
+              </a:rPr>
+              <a:t>120</a:t>
+            </a:r>
+            <a:endParaRPr lang="ja-JP" sz="1400" dirty="0"/>
+          </a:p>
+          <a:p>
+            <a:pPr indent="0" marL="0">
+              <a:lnSpc>
+                <a:spcPct val="100000"/>
+              </a:lnSpc>
+              <a:buNone/>
+            </a:pPr>
+            <a:r>
+              <a:rPr lang="ja-JP" altLang="en-US" sz="1400" b="1" dirty="0">
+                <a:solidFill>
+                  <a:schemeClr val="bg1"/>
+                </a:solidFill>
+                <a:latin typeface="Consolas" pitchFamily="34" charset="0"/>
+                <a:ea typeface="メイリオ" pitchFamily="34" charset="-122"/>
+                <a:cs typeface="Consolas" pitchFamily="34" charset="-120"/>
+              </a:rPr>
+              <a:t>OUTPUT002</a:t>
+            </a:r>
+            <a:pPr indent="0" marL="0">
+              <a:lnSpc>
+                <a:spcPct val="100000"/>
+              </a:lnSpc>
+              <a:buNone/>
+            </a:pPr>
+            <a:r>
+              <a:rPr lang="ja-JP" altLang="en-US" sz="1400" dirty="0">
+                <a:solidFill>
+                  <a:schemeClr val="accent5"/>
+                </a:solidFill>
+                <a:latin typeface="Consolas" pitchFamily="34" charset="0"/>
+                <a:ea typeface="メイリオ" pitchFamily="34" charset="-122"/>
+                <a:cs typeface="Consolas" pitchFamily="34" charset="-120"/>
+              </a:rPr>
+              <a:t>|</a:t>
+            </a:r>
+            <a:pPr indent="0" marL="0">
+              <a:lnSpc>
+                <a:spcPct val="100000"/>
+              </a:lnSpc>
+              <a:buNone/>
+            </a:pPr>
+            <a:r>
+              <a:rPr lang="ja-JP" altLang="en-US" sz="1400" b="1" dirty="0">
+                <a:solidFill>
+                  <a:schemeClr val="bg1"/>
+                </a:solidFill>
+                <a:latin typeface="Consolas" pitchFamily="34" charset="0"/>
+                <a:ea typeface="メイリオ" pitchFamily="34" charset="-122"/>
+                <a:cs typeface="Consolas" pitchFamily="34" charset="-120"/>
+              </a:rPr>
+              <a:t>P002</a:t>
+            </a:r>
+            <a:pPr indent="0" marL="0">
+              <a:lnSpc>
+                <a:spcPct val="100000"/>
+              </a:lnSpc>
+              <a:buNone/>
+            </a:pPr>
+            <a:r>
+              <a:rPr lang="ja-JP" altLang="en-US" sz="1400" dirty="0">
+                <a:solidFill>
+                  <a:schemeClr val="accent5"/>
+                </a:solidFill>
+                <a:latin typeface="Consolas" pitchFamily="34" charset="0"/>
+                <a:ea typeface="メイリオ" pitchFamily="34" charset="-122"/>
+                <a:cs typeface="Consolas" pitchFamily="34" charset="-120"/>
+              </a:rPr>
+              <a:t>|</a:t>
+            </a:r>
+            <a:pPr indent="0" marL="0">
+              <a:lnSpc>
+                <a:spcPct val="100000"/>
+              </a:lnSpc>
+              <a:buNone/>
+            </a:pPr>
+            <a:r>
+              <a:rPr lang="ja-JP" altLang="en-US" sz="1400" b="1" dirty="0">
+                <a:solidFill>
+                  <a:schemeClr val="bg1"/>
+                </a:solidFill>
+                <a:latin typeface="Consolas" pitchFamily="34" charset="0"/>
+                <a:ea typeface="メイリオ" pitchFamily="34" charset="-122"/>
+                <a:cs typeface="Consolas" pitchFamily="34" charset="-120"/>
+              </a:rPr>
+              <a:t>ノート</a:t>
+            </a:r>
+            <a:pPr indent="0" marL="0">
+              <a:lnSpc>
+                <a:spcPct val="100000"/>
+              </a:lnSpc>
+              <a:buNone/>
+            </a:pPr>
+            <a:r>
+              <a:rPr lang="ja-JP" altLang="en-US" sz="1400" dirty="0">
+                <a:solidFill>
+                  <a:schemeClr val="accent5"/>
+                </a:solidFill>
+                <a:latin typeface="Consolas" pitchFamily="34" charset="0"/>
+                <a:ea typeface="メイリオ" pitchFamily="34" charset="-122"/>
+                <a:cs typeface="Consolas" pitchFamily="34" charset="-120"/>
+              </a:rPr>
+              <a:t>|</a:t>
+            </a:r>
+            <a:pPr indent="0" marL="0">
+              <a:lnSpc>
+                <a:spcPct val="100000"/>
+              </a:lnSpc>
+              <a:buNone/>
+            </a:pPr>
+            <a:r>
+              <a:rPr lang="ja-JP" altLang="en-US" sz="1400" b="1" dirty="0">
+                <a:solidFill>
+                  <a:schemeClr val="bg1"/>
+                </a:solidFill>
+                <a:latin typeface="Consolas" pitchFamily="34" charset="0"/>
+                <a:ea typeface="メイリオ" pitchFamily="34" charset="-122"/>
+                <a:cs typeface="Consolas" pitchFamily="34" charset="-120"/>
+              </a:rPr>
+              <a:t>300</a:t>
+            </a:r>
+            <a:pPr indent="0" marL="0">
+              <a:lnSpc>
+                <a:spcPct val="100000"/>
+              </a:lnSpc>
+              <a:buNone/>
+            </a:pPr>
+            <a:r>
+              <a:rPr lang="ja-JP" altLang="en-US" sz="1400" dirty="0">
+                <a:solidFill>
+                  <a:schemeClr val="accent5"/>
+                </a:solidFill>
+                <a:latin typeface="Consolas" pitchFamily="34" charset="0"/>
+                <a:ea typeface="メイリオ" pitchFamily="34" charset="-122"/>
+                <a:cs typeface="Consolas" pitchFamily="34" charset="-120"/>
+              </a:rPr>
+              <a:t>|</a:t>
+            </a:r>
+            <a:pPr indent="0" marL="0">
+              <a:lnSpc>
+                <a:spcPct val="100000"/>
+              </a:lnSpc>
+              <a:buNone/>
+            </a:pPr>
+            <a:r>
+              <a:rPr lang="ja-JP" altLang="en-US" sz="1400" b="1" dirty="0">
+                <a:solidFill>
+                  <a:schemeClr val="bg1"/>
+                </a:solidFill>
+                <a:latin typeface="Consolas" pitchFamily="34" charset="0"/>
+                <a:ea typeface="メイリオ" pitchFamily="34" charset="-122"/>
+                <a:cs typeface="Consolas" pitchFamily="34" charset="-120"/>
+              </a:rPr>
+              <a:t>50</a:t>
+            </a:r>
+            <a:endParaRPr lang="ja-JP" sz="1400" dirty="0"/>
+          </a:p>
+        </p:txBody>
+      </p:sp>
+      <p:sp>
+        <p:nvSpPr>
+          <p:cNvPr id="8" name="Shape 5"/>
           <p:cNvSpPr/>
           <p:nvPr/>
         </p:nvSpPr>
         <p:spPr>
           <a:xfrm>
-            <a:off x="548640" y="4152646"/>
-            <a:ext cx="5120640" cy="777240"/>
+            <a:off x="6263640" y="1280160"/>
+            <a:ext cx="5379415" cy="1143000"/>
           </a:xfrm>
           <a:prstGeom prst="roundRect">
             <a:avLst>
-              <a:gd name="adj" fmla="val 7059"/>
+              <a:gd name="adj" fmla="val 4800"/>
             </a:avLst>
           </a:prstGeom>
           <a:solidFill>
@@ -12984,14 +13459,14 @@
       </p:sp>
       <p:sp>
         <p:nvSpPr>
-          <p:cNvPr id="10" name="Text 7"/>
+          <p:cNvPr id="9" name="Text 6"/>
           <p:cNvSpPr txBox="1"/>
           <p:nvPr/>
         </p:nvSpPr>
         <p:spPr>
           <a:xfrm>
-            <a:off x="731520" y="4152646"/>
-            <a:ext cx="4846320" cy="777240"/>
+            <a:off x="6446520" y="1280160"/>
+            <a:ext cx="5013655" cy="1143000"/>
           </a:xfrm>
           <a:prstGeom prst="rect">
             <a:avLst/>
@@ -13007,7 +13482,7 @@
               <a:buNone/>
             </a:pPr>
             <a:r>
-              <a:rPr lang="ja-JP" altLang="en-US" sz="1300" dirty="0">
+              <a:rPr lang="ja-JP" altLang="en-US" sz="1200" dirty="0">
                 <a:solidFill>
                   <a:schemeClr val="tx1"/>
                 </a:solidFill>
@@ -13015,16 +13490,16 @@
                 <a:ea typeface="メイリオ" pitchFamily="34" charset="-122"/>
                 <a:cs typeface="Consolas" pitchFamily="34" charset="-120"/>
               </a:rPr>
-              <a:t>@CsvSource({"INPUT001, OUTPUT001",</a:t>
-            </a:r>
-            <a:endParaRPr lang="ja-JP" sz="1300" dirty="0"/>
-          </a:p>
-          <a:p>
-            <a:pPr indent="0" marL="0">
-              <a:buNone/>
-            </a:pPr>
-            <a:r>
-              <a:rPr lang="ja-JP" altLang="en-US" sz="1300" dirty="0">
+              <a:t>@CsvSource(delimiter = '|', textBlock = """</a:t>
+            </a:r>
+            <a:endParaRPr lang="ja-JP" sz="1200" dirty="0"/>
+          </a:p>
+          <a:p>
+            <a:pPr indent="0" marL="0">
+              <a:buNone/>
+            </a:pPr>
+            <a:r>
+              <a:rPr lang="ja-JP" altLang="en-US" sz="1200" dirty="0">
                 <a:solidFill>
                   <a:schemeClr val="tx1"/>
                 </a:solidFill>
@@ -13032,9 +13507,79 @@
                 <a:ea typeface="メイリオ" pitchFamily="34" charset="-122"/>
                 <a:cs typeface="Consolas" pitchFamily="34" charset="-120"/>
               </a:rPr>
-              <a:t>            "INPUT002, OUTPUT002"})</a:t>
-            </a:r>
-            <a:endParaRPr lang="ja-JP" sz="1300" dirty="0"/>
+              <a:t>        INPUT001 | OUTPUT001 | P002 | 30</a:t>
+            </a:r>
+            <a:endParaRPr lang="ja-JP" sz="1200" dirty="0"/>
+          </a:p>
+          <a:p>
+            <a:pPr indent="0" marL="0">
+              <a:buNone/>
+            </a:pPr>
+            <a:r>
+              <a:rPr lang="ja-JP" altLang="en-US" sz="1200" dirty="0">
+                <a:solidFill>
+                  <a:schemeClr val="tx1"/>
+                </a:solidFill>
+                <a:latin typeface="Consolas" pitchFamily="34" charset="0"/>
+                <a:ea typeface="メイリオ" pitchFamily="34" charset="-122"/>
+                <a:cs typeface="Consolas" pitchFamily="34" charset="-120"/>
+              </a:rPr>
+              <a:t>        INPUT002 | OUTPUT002 | P001 | 20</a:t>
+            </a:r>
+            <a:endParaRPr lang="ja-JP" sz="1200" dirty="0"/>
+          </a:p>
+          <a:p>
+            <a:pPr indent="0" marL="0">
+              <a:buNone/>
+            </a:pPr>
+            <a:r>
+              <a:rPr lang="ja-JP" altLang="en-US" sz="1200" dirty="0">
+                <a:solidFill>
+                  <a:schemeClr val="tx1"/>
+                </a:solidFill>
+                <a:latin typeface="Consolas" pitchFamily="34" charset="0"/>
+                <a:ea typeface="メイリオ" pitchFamily="34" charset="-122"/>
+                <a:cs typeface="Consolas" pitchFamily="34" charset="-120"/>
+              </a:rPr>
+              <a:t>        """)</a:t>
+            </a:r>
+            <a:endParaRPr lang="ja-JP" sz="1200" dirty="0"/>
+          </a:p>
+        </p:txBody>
+      </p:sp>
+      <p:sp>
+        <p:nvSpPr>
+          <p:cNvPr id="10" name="Text 7"/>
+          <p:cNvSpPr txBox="1"/>
+          <p:nvPr/>
+        </p:nvSpPr>
+        <p:spPr>
+          <a:xfrm>
+            <a:off x="6263640" y="2487168"/>
+            <a:ext cx="5379415" cy="320040"/>
+          </a:xfrm>
+          <a:prstGeom prst="rect">
+            <a:avLst/>
+          </a:prstGeom>
+          <a:noFill/>
+          <a:ln/>
+        </p:spPr>
+        <p:txBody>
+          <a:bodyPr wrap="square" lIns="0" tIns="0" rIns="0" bIns="0" rtlCol="0" anchor="t"/>
+          <a:lstStyle/>
+          <a:p>
+            <a:pPr indent="0" marL="0">
+              <a:buNone/>
+            </a:pPr>
+            <a:r>
+              <a:rPr lang="ja-JP" altLang="en-US" sz="1200" dirty="0">
+                <a:solidFill>
+                  <a:schemeClr val="accent5"/>
+                </a:solidFill>
+              </a:rPr>
+              <a:t>引数：投入と期待のパターン名、入荷する商品、数量</a:t>
+            </a:r>
+            <a:endParaRPr lang="ja-JP" sz="1200" dirty="0"/>
           </a:p>
         </p:txBody>
       </p:sp>
@@ -13046,12 +13591,12 @@
         </p:nvSpPr>
         <p:spPr>
           <a:xfrm>
-            <a:off x="6355080" y="1280160"/>
-            <a:ext cx="5287975" cy="1325880"/>
+            <a:off x="6263640" y="2880360"/>
+            <a:ext cx="5379415" cy="960120"/>
           </a:xfrm>
           <a:prstGeom prst="roundRect">
             <a:avLst>
-              <a:gd name="adj" fmla="val 6897"/>
+              <a:gd name="adj" fmla="val 9524"/>
             </a:avLst>
           </a:prstGeom>
           <a:solidFill>
@@ -13068,7 +13613,7 @@
         </p:nvSpPr>
         <p:spPr>
           <a:xfrm>
-            <a:off x="6629400" y="1554480"/>
+            <a:off x="6492240" y="3131820"/>
             <a:ext cx="457200" cy="457200"/>
           </a:xfrm>
           <a:prstGeom prst="ellipse">
@@ -13088,7 +13633,7 @@
         </p:nvSpPr>
         <p:spPr>
           <a:xfrm>
-            <a:off x="6629400" y="1554480"/>
+            <a:off x="6492240" y="3131820"/>
             <a:ext cx="457200" cy="457200"/>
           </a:xfrm>
           <a:prstGeom prst="rect">
@@ -13124,8 +13669,8 @@
         </p:nvSpPr>
         <p:spPr>
           <a:xfrm>
-            <a:off x="7315200" y="1536192"/>
-            <a:ext cx="4053535" cy="1005840"/>
+            <a:off x="7132320" y="2990088"/>
+            <a:ext cx="4327855" cy="777240"/>
           </a:xfrm>
           <a:prstGeom prst="rect">
             <a:avLst/>
@@ -13144,12 +13689,12 @@
               <a:buNone/>
             </a:pPr>
             <a:r>
-              <a:rPr lang="ja-JP" altLang="en-US" sz="1600" b="1" dirty="0">
+              <a:rPr lang="ja-JP" altLang="en-US" sz="1500" b="1" dirty="0">
                 <a:solidFill>
                   <a:schemeClr val="tx1"/>
                 </a:solidFill>
               </a:rPr>
-              <a:t>投入は INPUT001、確認は OUTPUT001</a:t>
+              <a:t>変わらない行は共通に</a:t>
             </a:r>
             <a:endParaRPr lang="ja-JP" sz="1500" dirty="0"/>
           </a:p>
@@ -13158,12 +13703,12 @@
               <a:buNone/>
             </a:pPr>
             <a:r>
-              <a:rPr lang="ja-JP" altLang="en-US" sz="1400" dirty="0">
+              <a:rPr lang="ja-JP" altLang="en-US" sz="1300" dirty="0">
                 <a:solidFill>
                   <a:schemeClr val="tx2"/>
                 </a:solidFill>
               </a:rPr>
-              <a:t>テストでは、投入するときと確かめるときに、別のパターン名を渡します。</a:t>
+              <a:t>パターンが空の P003 は、投入され、変わっていないことも確かめられます。</a:t>
             </a:r>
             <a:endParaRPr lang="ja-JP" sz="1500" dirty="0"/>
           </a:p>
@@ -13177,12 +13722,12 @@
         </p:nvSpPr>
         <p:spPr>
           <a:xfrm>
-            <a:off x="6355080" y="2788920"/>
-            <a:ext cx="5287975" cy="1325880"/>
+            <a:off x="6263640" y="3959352"/>
+            <a:ext cx="5379415" cy="960120"/>
           </a:xfrm>
           <a:prstGeom prst="roundRect">
             <a:avLst>
-              <a:gd name="adj" fmla="val 6897"/>
+              <a:gd name="adj" fmla="val 9524"/>
             </a:avLst>
           </a:prstGeom>
           <a:solidFill>
@@ -13199,7 +13744,7 @@
         </p:nvSpPr>
         <p:spPr>
           <a:xfrm>
-            <a:off x="6629400" y="3063240"/>
+            <a:off x="6492240" y="4210812"/>
             <a:ext cx="457200" cy="457200"/>
           </a:xfrm>
           <a:prstGeom prst="ellipse">
@@ -13219,7 +13764,7 @@
         </p:nvSpPr>
         <p:spPr>
           <a:xfrm>
-            <a:off x="6629400" y="3063240"/>
+            <a:off x="6492240" y="4210812"/>
             <a:ext cx="457200" cy="457200"/>
           </a:xfrm>
           <a:prstGeom prst="rect">
@@ -13255,8 +13800,8 @@
         </p:nvSpPr>
         <p:spPr>
           <a:xfrm>
-            <a:off x="7315200" y="3044952"/>
-            <a:ext cx="4053535" cy="1005840"/>
+            <a:off x="7132320" y="4069080"/>
+            <a:ext cx="4327855" cy="777240"/>
           </a:xfrm>
           <a:prstGeom prst="rect">
             <a:avLst/>
@@ -13275,12 +13820,12 @@
               <a:buNone/>
             </a:pPr>
             <a:r>
-              <a:rPr lang="ja-JP" altLang="en-US" sz="1600" b="1" dirty="0">
+              <a:rPr lang="ja-JP" altLang="en-US" sz="1500" b="1" dirty="0">
                 <a:solidFill>
                   <a:schemeClr val="tx1"/>
                 </a:solidFill>
               </a:rPr>
-              <a:t>変わる値がひと目で分かる</a:t>
+              <a:t>準備の行を共有する</a:t>
             </a:r>
             <a:endParaRPr lang="ja-JP" sz="1500" dirty="0"/>
           </a:p>
@@ -13289,12 +13834,12 @@
               <a:buNone/>
             </a:pPr>
             <a:r>
-              <a:rPr lang="ja-JP" altLang="en-US" sz="1400" dirty="0">
+              <a:rPr lang="ja-JP" altLang="en-US" sz="1300" dirty="0">
                 <a:solidFill>
                   <a:schemeClr val="tx2"/>
                 </a:solidFill>
               </a:rPr>
-              <a:t>上下に並ぶので、処理で変わる値（P002 の在庫 50 → 80）を見比べやすくなります。</a:t>
+              <a:t>INPUT001,INPUT002 と書けば、2つのケースで同じ投入の行を使えます。</a:t>
             </a:r>
             <a:endParaRPr lang="ja-JP" sz="1500" dirty="0"/>
           </a:p>
@@ -13308,12 +13853,12 @@
         </p:nvSpPr>
         <p:spPr>
           <a:xfrm>
-            <a:off x="6355080" y="4297680"/>
-            <a:ext cx="5287975" cy="1325880"/>
+            <a:off x="6263640" y="5038344"/>
+            <a:ext cx="5379415" cy="960120"/>
           </a:xfrm>
           <a:prstGeom prst="roundRect">
             <a:avLst>
-              <a:gd name="adj" fmla="val 6897"/>
+              <a:gd name="adj" fmla="val 9524"/>
             </a:avLst>
           </a:prstGeom>
           <a:solidFill>
@@ -13330,7 +13875,7 @@
         </p:nvSpPr>
         <p:spPr>
           <a:xfrm>
-            <a:off x="6629400" y="4572000"/>
+            <a:off x="6492240" y="5289804"/>
             <a:ext cx="457200" cy="457200"/>
           </a:xfrm>
           <a:prstGeom prst="ellipse">
@@ -13350,7 +13895,7 @@
         </p:nvSpPr>
         <p:spPr>
           <a:xfrm>
-            <a:off x="6629400" y="4572000"/>
+            <a:off x="6492240" y="5289804"/>
             <a:ext cx="457200" cy="457200"/>
           </a:xfrm>
           <a:prstGeom prst="rect">
@@ -13386,8 +13931,8 @@
         </p:nvSpPr>
         <p:spPr>
           <a:xfrm>
-            <a:off x="7315200" y="4553712"/>
-            <a:ext cx="4053535" cy="1005840"/>
+            <a:off x="7132320" y="5148072"/>
+            <a:ext cx="4327855" cy="777240"/>
           </a:xfrm>
           <a:prstGeom prst="rect">
             <a:avLst/>
@@ -13406,12 +13951,12 @@
               <a:buNone/>
             </a:pPr>
             <a:r>
-              <a:rPr lang="ja-JP" altLang="en-US" sz="1600" b="1" dirty="0">
+              <a:rPr lang="ja-JP" altLang="en-US" sz="1500" b="1" dirty="0">
                 <a:solidFill>
                   <a:schemeClr val="tx1"/>
                 </a:solidFill>
               </a:rPr>
-              <a:t>ケースを足すのは行を足すだけ</a:t>
+              <a:t>変わる値が見比べやすい</a:t>
             </a:r>
             <a:endParaRPr lang="ja-JP" sz="1500" dirty="0"/>
           </a:p>
@@ -13420,12 +13965,12 @@
               <a:buNone/>
             </a:pPr>
             <a:r>
-              <a:rPr lang="ja-JP" altLang="en-US" sz="1400" dirty="0">
+              <a:rPr lang="ja-JP" altLang="en-US" sz="1300" dirty="0">
                 <a:solidFill>
                   <a:schemeClr val="tx2"/>
                 </a:solidFill>
               </a:rPr>
-              <a:t>INPUT002 と OUTPUT002 の行を書き、引数を1つ足せば、テストのコードはそのままです。</a:t>
+              <a:t>期待の行が並ぶので、ケースごとに変わる値（P002 の 80、P001 の 120）が分かります。</a:t>
             </a:r>
             <a:endParaRPr lang="ja-JP" sz="1500" dirty="0"/>
           </a:p>
